--- a/tests/Lokad.OoxPdf.Tests/Cases/pptx-ladder-04-typography-whitespace-controls-probe.pptx
+++ b/tests/Lokad.OoxPdf.Tests/Cases/pptx-ladder-04-typography-whitespace-controls-probe.pptx
@@ -3409,7 +3409,7 @@
               <a:rPr sz="2600">
                 <a:latin typeface="Calibri"/>
               </a:rPr>
-              <a:t>DÃ©pendance Ã©levÃ©e - coÃ»t unitaire</a:t>
+              <a:t>Dépendance élevée - coût unitaire</a:t>
             </a:r>
           </a:p>
         </p:txBody>
